--- a/docs/FORMeGO-prezentacia.pptx
+++ b/docs/FORMeGO-prezentacia.pptx
@@ -15586,15 +15586,7 @@
                   <a:srgbClr val="ABC0DE"/>
                 </a:solidFill>
               </a:rPr>
-              <a:t>Viac údajov </a:t>
-            </a:r>
-            <a:r>
-              <a:rPr lang="sk-SK" sz="1600">
-                <a:solidFill>
-                  <a:srgbClr val="ABC0DE"/>
-                </a:solidFill>
-              </a:rPr>
-              <a:t>o osobe.</a:t>
+              <a:t>Viac údajov o osobe.</a:t>
             </a:r>
             <a:endParaRPr lang="sk-SK" sz="1600" b="0" noProof="0" dirty="0">
               <a:solidFill>
